--- a/slides/S2_LoRa_downlink.pptx
+++ b/slides/S2_LoRa_downlink.pptx
@@ -207,7 +207,7 @@
           <a:p>
             <a:fld id="{DAA656B2-ED32-8044-9B2A-829653741135}" type="datetimeFigureOut">
               <a:rPr lang="nl-NL" smtClean="0"/>
-              <a:t>29-03-2026</a:t>
+              <a:t>31-3-2026</a:t>
             </a:fld>
             <a:endParaRPr lang="nl-NL"/>
           </a:p>
@@ -1151,7 +1151,7 @@
           <a:p>
             <a:fld id="{3A7CBCB4-1EFE-4E3B-9C8A-BCC4F06648F3}" type="datetimeFigureOut">
               <a:rPr lang="en-NL" smtClean="0"/>
-              <a:t>3/29/26</a:t>
+              <a:t>03/31/2026</a:t>
             </a:fld>
             <a:endParaRPr lang="en-NL"/>
           </a:p>
@@ -1351,7 +1351,7 @@
           <a:p>
             <a:fld id="{3A7CBCB4-1EFE-4E3B-9C8A-BCC4F06648F3}" type="datetimeFigureOut">
               <a:rPr lang="en-NL" smtClean="0"/>
-              <a:t>3/29/26</a:t>
+              <a:t>03/31/2026</a:t>
             </a:fld>
             <a:endParaRPr lang="en-NL"/>
           </a:p>
@@ -1561,7 +1561,7 @@
           <a:p>
             <a:fld id="{3A7CBCB4-1EFE-4E3B-9C8A-BCC4F06648F3}" type="datetimeFigureOut">
               <a:rPr lang="en-NL" smtClean="0"/>
-              <a:t>3/29/26</a:t>
+              <a:t>03/31/2026</a:t>
             </a:fld>
             <a:endParaRPr lang="en-NL"/>
           </a:p>
@@ -1761,7 +1761,7 @@
           <a:p>
             <a:fld id="{3A7CBCB4-1EFE-4E3B-9C8A-BCC4F06648F3}" type="datetimeFigureOut">
               <a:rPr lang="en-NL" smtClean="0"/>
-              <a:t>3/29/26</a:t>
+              <a:t>03/31/2026</a:t>
             </a:fld>
             <a:endParaRPr lang="en-NL"/>
           </a:p>
@@ -2037,7 +2037,7 @@
           <a:p>
             <a:fld id="{3A7CBCB4-1EFE-4E3B-9C8A-BCC4F06648F3}" type="datetimeFigureOut">
               <a:rPr lang="en-NL" smtClean="0"/>
-              <a:t>3/29/26</a:t>
+              <a:t>03/31/2026</a:t>
             </a:fld>
             <a:endParaRPr lang="en-NL"/>
           </a:p>
@@ -2305,7 +2305,7 @@
           <a:p>
             <a:fld id="{3A7CBCB4-1EFE-4E3B-9C8A-BCC4F06648F3}" type="datetimeFigureOut">
               <a:rPr lang="en-NL" smtClean="0"/>
-              <a:t>3/29/26</a:t>
+              <a:t>03/31/2026</a:t>
             </a:fld>
             <a:endParaRPr lang="en-NL"/>
           </a:p>
@@ -2720,7 +2720,7 @@
           <a:p>
             <a:fld id="{3A7CBCB4-1EFE-4E3B-9C8A-BCC4F06648F3}" type="datetimeFigureOut">
               <a:rPr lang="en-NL" smtClean="0"/>
-              <a:t>3/29/26</a:t>
+              <a:t>03/31/2026</a:t>
             </a:fld>
             <a:endParaRPr lang="en-NL"/>
           </a:p>
@@ -2862,7 +2862,7 @@
           <a:p>
             <a:fld id="{3A7CBCB4-1EFE-4E3B-9C8A-BCC4F06648F3}" type="datetimeFigureOut">
               <a:rPr lang="en-NL" smtClean="0"/>
-              <a:t>3/29/26</a:t>
+              <a:t>03/31/2026</a:t>
             </a:fld>
             <a:endParaRPr lang="en-NL"/>
           </a:p>
@@ -2975,7 +2975,7 @@
           <a:p>
             <a:fld id="{3A7CBCB4-1EFE-4E3B-9C8A-BCC4F06648F3}" type="datetimeFigureOut">
               <a:rPr lang="en-NL" smtClean="0"/>
-              <a:t>3/29/26</a:t>
+              <a:t>03/31/2026</a:t>
             </a:fld>
             <a:endParaRPr lang="en-NL"/>
           </a:p>
@@ -3288,7 +3288,7 @@
           <a:p>
             <a:fld id="{3A7CBCB4-1EFE-4E3B-9C8A-BCC4F06648F3}" type="datetimeFigureOut">
               <a:rPr lang="en-NL" smtClean="0"/>
-              <a:t>3/29/26</a:t>
+              <a:t>03/31/2026</a:t>
             </a:fld>
             <a:endParaRPr lang="en-NL"/>
           </a:p>
@@ -3577,7 +3577,7 @@
           <a:p>
             <a:fld id="{3A7CBCB4-1EFE-4E3B-9C8A-BCC4F06648F3}" type="datetimeFigureOut">
               <a:rPr lang="en-NL" smtClean="0"/>
-              <a:t>3/29/26</a:t>
+              <a:t>03/31/2026</a:t>
             </a:fld>
             <a:endParaRPr lang="en-NL"/>
           </a:p>
@@ -3820,7 +3820,7 @@
           <a:p>
             <a:fld id="{3A7CBCB4-1EFE-4E3B-9C8A-BCC4F06648F3}" type="datetimeFigureOut">
               <a:rPr lang="en-NL" smtClean="0"/>
-              <a:t>3/29/26</a:t>
+              <a:t>03/31/2026</a:t>
             </a:fld>
             <a:endParaRPr lang="en-NL"/>
           </a:p>
@@ -4674,32 +4674,18 @@
             </a:r>
             <a:r>
               <a:rPr lang="en-US" dirty="0"/>
-              <a:t> MQTT </a:t>
+              <a:t> </a:t>
             </a:r>
             <a:r>
               <a:rPr lang="en-US" dirty="0" err="1"/>
-              <a:t>integratie</a:t>
-            </a:r>
+              <a:t>stoplicht</a:t>
+            </a:r>
+            <a:endParaRPr lang="en-US" dirty="0"/>
+          </a:p>
+          <a:p>
             <a:r>
               <a:rPr lang="en-US" dirty="0"/>
-              <a:t> </a:t>
-            </a:r>
-            <a:r>
-              <a:rPr lang="en-US" dirty="0" err="1"/>
-              <a:t>aan</a:t>
-            </a:r>
-            <a:endParaRPr lang="en-US" dirty="0"/>
-          </a:p>
-          <a:p>
-            <a:r>
-              <a:rPr lang="en-US" dirty="0"/>
-              <a:t>Test de MQTT service</a:t>
-            </a:r>
-          </a:p>
-          <a:p>
-            <a:r>
-              <a:rPr lang="en-US" dirty="0"/>
-              <a:t>Maak </a:t>
+              <a:t>Test </a:t>
             </a:r>
             <a:r>
               <a:rPr lang="en-US" dirty="0" err="1"/>
@@ -4707,11 +4693,11 @@
             </a:r>
             <a:r>
               <a:rPr lang="en-US" dirty="0"/>
-              <a:t> Python </a:t>
-            </a:r>
-            <a:r>
-              <a:rPr lang="en-US" dirty="0" err="1"/>
-              <a:t>integratie</a:t>
+              <a:t> downlink </a:t>
+            </a:r>
+            <a:r>
+              <a:rPr lang="en-US"/>
+              <a:t>bericht</a:t>
             </a:r>
             <a:endParaRPr lang="en-US" dirty="0"/>
           </a:p>
